--- a/瑞士轮.pptx
+++ b/瑞士轮.pptx
@@ -3908,7 +3908,7 @@
                           <a:srgbClr val="0070C0"/>
                         </a:solidFill>
                       </a:rPr>
-                      <a:t>3</a:t>
+                      <a:t>/</a:t>
                     </a:r>
                     <a:endParaRPr lang="en-US" sz="4550" b="1">
                       <a:solidFill>
@@ -4040,7 +4040,7 @@
                           <a:srgbClr val="0070C0"/>
                         </a:solidFill>
                       </a:rPr>
-                      <a:t>0</a:t>
+                      <a:t>/</a:t>
                     </a:r>
                     <a:endParaRPr lang="en-US" sz="4550" b="1">
                       <a:solidFill>
@@ -4187,7 +4187,7 @@
                           <a:srgbClr val="0070C0"/>
                         </a:solidFill>
                       </a:rPr>
-                      <a:t>3</a:t>
+                      <a:t>/</a:t>
                     </a:r>
                     <a:endParaRPr lang="en-US" sz="4550" b="1">
                       <a:solidFill>
@@ -4319,7 +4319,7 @@
                           <a:srgbClr val="0070C0"/>
                         </a:solidFill>
                       </a:rPr>
-                      <a:t>0</a:t>
+                      <a:t>/</a:t>
                     </a:r>
                     <a:endParaRPr lang="en-US" sz="4550" b="1">
                       <a:solidFill>
@@ -4618,7 +4618,7 @@
                           <a:srgbClr val="0070C0"/>
                         </a:solidFill>
                       </a:rPr>
-                      <a:t>3</a:t>
+                      <a:t>/</a:t>
                     </a:r>
                     <a:endParaRPr lang="en-US" sz="4550" b="1">
                       <a:solidFill>
@@ -4747,10 +4747,10 @@
                     <a:r>
                       <a:rPr lang="en-US" sz="4550" b="1">
                         <a:solidFill>
-                          <a:srgbClr val="0070C0"/>
+                          <a:schemeClr val="tx1"/>
                         </a:solidFill>
                       </a:rPr>
-                      <a:t>0</a:t>
+                      <a:t>/</a:t>
                     </a:r>
                     <a:endParaRPr lang="en-US" sz="4550" b="1">
                       <a:solidFill>
@@ -4897,7 +4897,7 @@
                           <a:srgbClr val="0070C0"/>
                         </a:solidFill>
                       </a:rPr>
-                      <a:t>3</a:t>
+                      <a:t>/</a:t>
                     </a:r>
                     <a:endParaRPr lang="en-US" sz="4550" b="1">
                       <a:solidFill>
@@ -5029,7 +5029,7 @@
                           <a:srgbClr val="0070C0"/>
                         </a:solidFill>
                       </a:rPr>
-                      <a:t>0</a:t>
+                      <a:t>/</a:t>
                     </a:r>
                     <a:endParaRPr lang="en-US" sz="4550" b="1">
                       <a:solidFill>
@@ -5911,7 +5911,7 @@
                           <a:srgbClr val="0070C0"/>
                         </a:solidFill>
                       </a:rPr>
-                      <a:t>3</a:t>
+                      <a:t>/</a:t>
                     </a:r>
                     <a:endParaRPr lang="en-US" sz="4550" b="1">
                       <a:solidFill>
@@ -6043,7 +6043,7 @@
                           <a:srgbClr val="0070C0"/>
                         </a:solidFill>
                       </a:rPr>
-                      <a:t>0</a:t>
+                      <a:t>/</a:t>
                     </a:r>
                     <a:endParaRPr lang="en-US" sz="4550" b="1">
                       <a:solidFill>
@@ -6190,7 +6190,7 @@
                           <a:srgbClr val="0070C0"/>
                         </a:solidFill>
                       </a:rPr>
-                      <a:t>3</a:t>
+                      <a:t>/</a:t>
                     </a:r>
                     <a:endParaRPr lang="en-US" sz="4550" b="1">
                       <a:solidFill>
@@ -6322,7 +6322,7 @@
                           <a:srgbClr val="0070C0"/>
                         </a:solidFill>
                       </a:rPr>
-                      <a:t>0</a:t>
+                      <a:t>/</a:t>
                     </a:r>
                     <a:endParaRPr lang="en-US" sz="4550" b="1">
                       <a:solidFill>
@@ -7051,7 +7051,7 @@
                         <a:srgbClr val="0070C0"/>
                       </a:solidFill>
                     </a:rPr>
-                    <a:t>3</a:t>
+                    <a:t>/</a:t>
                   </a:r>
                   <a:endParaRPr lang="en-US" sz="4550" b="1">
                     <a:solidFill>
@@ -7184,7 +7184,7 @@
                         <a:srgbClr val="0070C0"/>
                       </a:solidFill>
                     </a:rPr>
-                    <a:t>0</a:t>
+                    <a:t>/</a:t>
                   </a:r>
                   <a:endParaRPr lang="en-US" sz="4550" b="1">
                     <a:solidFill>
@@ -7493,7 +7493,7 @@
                           <a:srgbClr val="0070C0"/>
                         </a:solidFill>
                       </a:rPr>
-                      <a:t>3</a:t>
+                      <a:t>/</a:t>
                     </a:r>
                     <a:endParaRPr lang="en-US" sz="4550" b="1">
                       <a:solidFill>
@@ -7646,10 +7646,10 @@
                     <a:r>
                       <a:rPr lang="en-US" sz="4550" b="1">
                         <a:solidFill>
-                          <a:srgbClr val="0070C0"/>
+                          <a:schemeClr val="tx1"/>
                         </a:solidFill>
                       </a:rPr>
-                      <a:t>0</a:t>
+                      <a:t>/</a:t>
                     </a:r>
                     <a:endParaRPr lang="en-US" sz="4550" b="1">
                       <a:solidFill>
@@ -7964,7 +7964,7 @@
                           <a:srgbClr val="0070C0"/>
                         </a:solidFill>
                       </a:rPr>
-                      <a:t>3</a:t>
+                      <a:t>/</a:t>
                     </a:r>
                     <a:endParaRPr lang="en-US" sz="4550" b="1">
                       <a:solidFill>
@@ -8129,7 +8129,7 @@
                           <a:srgbClr val="0070C0"/>
                         </a:solidFill>
                       </a:rPr>
-                      <a:t>0</a:t>
+                      <a:t>/</a:t>
                     </a:r>
                     <a:endParaRPr lang="en-US" sz="4550" b="1">
                       <a:solidFill>
@@ -8433,7 +8433,7 @@
                           <a:srgbClr val="0070C0"/>
                         </a:solidFill>
                       </a:rPr>
-                      <a:t>3</a:t>
+                      <a:t>/</a:t>
                     </a:r>
                     <a:endParaRPr lang="en-US" sz="4550" b="1">
                       <a:solidFill>
@@ -8598,7 +8598,7 @@
                           <a:srgbClr val="0070C0"/>
                         </a:solidFill>
                       </a:rPr>
-                      <a:t>0</a:t>
+                      <a:t>/</a:t>
                     </a:r>
                     <a:endParaRPr lang="en-US" sz="4550" b="1">
                       <a:solidFill>
@@ -8993,7 +8993,7 @@
                         <a:srgbClr val="0070C0"/>
                       </a:solidFill>
                     </a:rPr>
-                    <a:t>3</a:t>
+                    <a:t>/</a:t>
                   </a:r>
                   <a:endParaRPr lang="en-US" sz="4550" b="1">
                     <a:solidFill>
@@ -9125,7 +9125,7 @@
                         <a:srgbClr val="0070C0"/>
                       </a:solidFill>
                     </a:rPr>
-                    <a:t>0</a:t>
+                    <a:t>/</a:t>
                   </a:r>
                   <a:endParaRPr lang="en-US" sz="4550" b="1">
                     <a:solidFill>
@@ -9272,7 +9272,7 @@
                         <a:srgbClr val="0070C0"/>
                       </a:solidFill>
                     </a:rPr>
-                    <a:t>3</a:t>
+                    <a:t>/</a:t>
                   </a:r>
                   <a:endParaRPr lang="en-US" sz="4550" b="1">
                     <a:solidFill>
@@ -9404,7 +9404,7 @@
                         <a:srgbClr val="0070C0"/>
                       </a:solidFill>
                     </a:rPr>
-                    <a:t>0</a:t>
+                    <a:t>/</a:t>
                   </a:r>
                   <a:endParaRPr lang="en-US" sz="4550" b="1">
                     <a:solidFill>
@@ -9551,7 +9551,7 @@
                         <a:srgbClr val="0070C0"/>
                       </a:solidFill>
                     </a:rPr>
-                    <a:t>3</a:t>
+                    <a:t>/</a:t>
                   </a:r>
                   <a:endParaRPr lang="en-US" sz="4550" b="1">
                     <a:solidFill>
@@ -9683,7 +9683,7 @@
                         <a:srgbClr val="0070C0"/>
                       </a:solidFill>
                     </a:rPr>
-                    <a:t>0</a:t>
+                    <a:t>/</a:t>
                   </a:r>
                   <a:endParaRPr lang="en-US" sz="4550" b="1">
                     <a:solidFill>
@@ -9830,7 +9830,7 @@
                         <a:srgbClr val="0070C0"/>
                       </a:solidFill>
                     </a:rPr>
-                    <a:t>3</a:t>
+                    <a:t>/</a:t>
                   </a:r>
                   <a:endParaRPr lang="en-US" sz="4550" b="1">
                     <a:solidFill>
@@ -9962,7 +9962,7 @@
                         <a:srgbClr val="0070C0"/>
                       </a:solidFill>
                     </a:rPr>
-                    <a:t>0</a:t>
+                    <a:t>/</a:t>
                   </a:r>
                   <a:endParaRPr lang="en-US" sz="4550" b="1">
                     <a:solidFill>
@@ -10164,7 +10164,7 @@
                         <a:srgbClr val="0070C0"/>
                       </a:solidFill>
                     </a:rPr>
-                    <a:t>3</a:t>
+                    <a:t>/</a:t>
                   </a:r>
                   <a:endParaRPr lang="en-US" sz="4550" b="1">
                     <a:solidFill>
@@ -10296,7 +10296,7 @@
                         <a:srgbClr val="0070C0"/>
                       </a:solidFill>
                     </a:rPr>
-                    <a:t>0</a:t>
+                    <a:t>/</a:t>
                   </a:r>
                   <a:endParaRPr lang="en-US" sz="4550" b="1">
                     <a:solidFill>
@@ -10443,7 +10443,7 @@
                         <a:srgbClr val="0070C0"/>
                       </a:solidFill>
                     </a:rPr>
-                    <a:t>3</a:t>
+                    <a:t>/</a:t>
                   </a:r>
                   <a:endParaRPr lang="en-US" sz="4550" b="1">
                     <a:solidFill>
@@ -10575,7 +10575,7 @@
                         <a:srgbClr val="0070C0"/>
                       </a:solidFill>
                     </a:rPr>
-                    <a:t>0</a:t>
+                    <a:t>/</a:t>
                   </a:r>
                   <a:endParaRPr lang="en-US" sz="4550" b="1">
                     <a:solidFill>
@@ -11256,7 +11256,7 @@
                         <a:srgbClr val="0070C0"/>
                       </a:solidFill>
                     </a:rPr>
-                    <a:t>3</a:t>
+                    <a:t>/</a:t>
                   </a:r>
                   <a:endParaRPr lang="en-US" sz="4550" b="1">
                     <a:solidFill>
@@ -11388,7 +11388,7 @@
                         <a:srgbClr val="0070C0"/>
                       </a:solidFill>
                     </a:rPr>
-                    <a:t>0</a:t>
+                    <a:t>/</a:t>
                   </a:r>
                   <a:endParaRPr lang="en-US" sz="4550" b="1">
                     <a:solidFill>
@@ -11535,7 +11535,7 @@
                         <a:srgbClr val="0070C0"/>
                       </a:solidFill>
                     </a:rPr>
-                    <a:t>3</a:t>
+                    <a:t>/</a:t>
                   </a:r>
                   <a:endParaRPr lang="en-US" sz="4550" b="1">
                     <a:solidFill>
@@ -11667,7 +11667,7 @@
                         <a:srgbClr val="0070C0"/>
                       </a:solidFill>
                     </a:rPr>
-                    <a:t>0</a:t>
+                    <a:t>/</a:t>
                   </a:r>
                   <a:endParaRPr lang="en-US" sz="4550" b="1">
                     <a:solidFill>
@@ -11814,7 +11814,7 @@
                         <a:srgbClr val="0070C0"/>
                       </a:solidFill>
                     </a:rPr>
-                    <a:t>3</a:t>
+                    <a:t>/</a:t>
                   </a:r>
                   <a:endParaRPr lang="en-US" sz="4550" b="1">
                     <a:solidFill>
@@ -11946,7 +11946,7 @@
                         <a:srgbClr val="0070C0"/>
                       </a:solidFill>
                     </a:rPr>
-                    <a:t>0</a:t>
+                    <a:t>/</a:t>
                   </a:r>
                   <a:endParaRPr lang="en-US" sz="4550" b="1">
                     <a:solidFill>
@@ -12093,7 +12093,7 @@
                         <a:srgbClr val="0070C0"/>
                       </a:solidFill>
                     </a:rPr>
-                    <a:t>3</a:t>
+                    <a:t>/</a:t>
                   </a:r>
                   <a:endParaRPr lang="en-US" sz="4550" b="1">
                     <a:solidFill>
@@ -12225,7 +12225,7 @@
                         <a:srgbClr val="0070C0"/>
                       </a:solidFill>
                     </a:rPr>
-                    <a:t>0</a:t>
+                    <a:t>/</a:t>
                   </a:r>
                   <a:endParaRPr lang="en-US" sz="4550" b="1">
                     <a:solidFill>
@@ -12427,7 +12427,7 @@
                         <a:srgbClr val="0070C0"/>
                       </a:solidFill>
                     </a:rPr>
-                    <a:t>3</a:t>
+                    <a:t>/</a:t>
                   </a:r>
                   <a:endParaRPr lang="en-US" sz="4550" b="1">
                     <a:solidFill>
@@ -12559,7 +12559,7 @@
                         <a:srgbClr val="0070C0"/>
                       </a:solidFill>
                     </a:rPr>
-                    <a:t>0</a:t>
+                    <a:t>/</a:t>
                   </a:r>
                   <a:endParaRPr lang="en-US" sz="4550" b="1">
                     <a:solidFill>
@@ -12706,7 +12706,7 @@
                         <a:srgbClr val="0070C0"/>
                       </a:solidFill>
                     </a:rPr>
-                    <a:t>3</a:t>
+                    <a:t>/</a:t>
                   </a:r>
                   <a:endParaRPr lang="en-US" sz="4550" b="1">
                     <a:solidFill>
@@ -12838,7 +12838,7 @@
                         <a:srgbClr val="0070C0"/>
                       </a:solidFill>
                     </a:rPr>
-                    <a:t>0</a:t>
+                    <a:t>/</a:t>
                   </a:r>
                   <a:endParaRPr lang="en-US" sz="4550" b="1">
                     <a:solidFill>
@@ -13854,7 +13854,7 @@
                         <a:srgbClr val="0070C0"/>
                       </a:solidFill>
                     </a:rPr>
-                    <a:t>3</a:t>
+                    <a:t>/</a:t>
                   </a:r>
                   <a:endParaRPr lang="en-US" sz="4550" b="1">
                     <a:solidFill>
@@ -13987,7 +13987,7 @@
                         <a:srgbClr val="0070C0"/>
                       </a:solidFill>
                     </a:rPr>
-                    <a:t>0</a:t>
+                    <a:t>/</a:t>
                   </a:r>
                   <a:endParaRPr lang="en-US" sz="4550" b="1">
                     <a:solidFill>
@@ -14296,7 +14296,7 @@
                           <a:srgbClr val="0070C0"/>
                         </a:solidFill>
                       </a:rPr>
-                      <a:t>3</a:t>
+                      <a:t>/</a:t>
                     </a:r>
                     <a:endParaRPr lang="en-US" sz="4550" b="1">
                       <a:solidFill>
@@ -14452,7 +14452,7 @@
                           <a:srgbClr val="0070C0"/>
                         </a:solidFill>
                       </a:rPr>
-                      <a:t>0</a:t>
+                      <a:t>/</a:t>
                     </a:r>
                     <a:endParaRPr lang="en-US" sz="4550" b="1">
                       <a:solidFill>
@@ -14767,7 +14767,7 @@
                           <a:srgbClr val="0070C0"/>
                         </a:solidFill>
                       </a:rPr>
-                      <a:t>3</a:t>
+                      <a:t>/</a:t>
                     </a:r>
                     <a:endParaRPr lang="en-US" sz="4550" b="1">
                       <a:solidFill>
@@ -14932,7 +14932,7 @@
                           <a:srgbClr val="0070C0"/>
                         </a:solidFill>
                       </a:rPr>
-                      <a:t>0</a:t>
+                      <a:t>/</a:t>
                     </a:r>
                     <a:endParaRPr lang="en-US" sz="4550" b="1">
                       <a:solidFill>
@@ -15236,7 +15236,7 @@
                           <a:srgbClr val="0070C0"/>
                         </a:solidFill>
                       </a:rPr>
-                      <a:t>3</a:t>
+                      <a:t>/</a:t>
                     </a:r>
                     <a:endParaRPr lang="en-US" sz="4550" b="1">
                       <a:solidFill>
@@ -15401,7 +15401,7 @@
                           <a:srgbClr val="0070C0"/>
                         </a:solidFill>
                       </a:rPr>
-                      <a:t>0</a:t>
+                      <a:t>/</a:t>
                     </a:r>
                     <a:endParaRPr lang="en-US" sz="4550" b="1">
                       <a:solidFill>
